--- a/kyro-magic.pptx
+++ b/kyro-magic.pptx
@@ -10,10 +10,9 @@
     <p:sldId id="258" r:id="rId4"/>
     <p:sldId id="259" r:id="rId5"/>
     <p:sldId id="260" r:id="rId6"/>
-    <p:sldId id="261" r:id="rId7"/>
   </p:sldIdLst>
   <p:notesMasterIdLst>
-    <p:notesMasterId r:id="rId8"/>
+    <p:notesMasterId r:id="rId7"/>
   </p:notesMasterIdLst>
   <p:sldSz cx="12192000" cy="6858000"/>
   <p:notesSz cx="6858000" cy="12192000"/>
@@ -883,94 +882,6 @@
             <a:fld id="{F7021451-1387-4CA6-816F-3879F97B5CBC}" type="slidenum">
               <a:rPr lang="en-US"/>
               <a:t>5</a:t>
-            </a:fld>
-            <a:endParaRPr lang="en-US"/>
-          </a:p>
-        </p:txBody>
-      </p:sp>
-    </p:spTree>
-    <p:extLst>
-      <p:ext uri="{BB962C8B-B14F-4D97-AF65-F5344CB8AC3E}">
-        <p14:creationId xmlns:p14="http://schemas.microsoft.com/office/powerpoint/2010/main" val="1024086991"/>
-      </p:ext>
-    </p:extLst>
-  </p:cSld>
-  <p:clrMapOvr>
-    <a:masterClrMapping/>
-  </p:clrMapOvr>
-</p:notes>
-</file>
-
-<file path=ppt/notesSlides/notesSlide6.xml><?xml version="1.0" encoding="utf-8"?>
-<p:notes xmlns:a="http://schemas.openxmlformats.org/drawingml/2006/main" xmlns:r="http://schemas.openxmlformats.org/officeDocument/2006/relationships" xmlns:p="http://schemas.openxmlformats.org/presentationml/2006/main">
-  <p:cSld>
-    <p:spTree>
-      <p:nvGrpSpPr>
-        <p:cNvPr id="1" name=""/>
-        <p:cNvGrpSpPr/>
-        <p:nvPr/>
-      </p:nvGrpSpPr>
-      <p:grpSpPr>
-        <a:xfrm>
-          <a:off x="0" y="0"/>
-          <a:ext cx="0" cy="0"/>
-          <a:chOff x="0" y="0"/>
-          <a:chExt cx="0" cy="0"/>
-        </a:xfrm>
-      </p:grpSpPr>
-      <p:sp>
-        <p:nvSpPr>
-          <p:cNvPr id="2" name="Slide Image Placeholder 1"/>
-          <p:cNvSpPr>
-            <a:spLocks noGrp="1" noRot="1" noChangeAspect="1"/>
-          </p:cNvSpPr>
-          <p:nvPr>
-            <p:ph type="sldImg"/>
-          </p:nvPr>
-        </p:nvSpPr>
-        <p:spPr/>
-      </p:sp>
-      <p:sp>
-        <p:nvSpPr>
-          <p:cNvPr id="3" name="Notes Placeholder 2"/>
-          <p:cNvSpPr>
-            <a:spLocks noGrp="1"/>
-          </p:cNvSpPr>
-          <p:nvPr>
-            <p:ph type="body" idx="1"/>
-          </p:nvPr>
-        </p:nvSpPr>
-        <p:spPr/>
-        <p:txBody>
-          <a:bodyPr/>
-          <a:lstStyle/>
-          <a:p>
-            <a:r>
-              <a:rPr lang="en-US" dirty="0"/>
-              <a:t/>
-            </a:r>
-            <a:endParaRPr lang="en-US" dirty="0"/>
-          </a:p>
-        </p:txBody>
-      </p:sp>
-      <p:sp>
-        <p:nvSpPr>
-          <p:cNvPr id="4" name="Slide Number Placeholder 3"/>
-          <p:cNvSpPr>
-            <a:spLocks noGrp="1"/>
-          </p:cNvSpPr>
-          <p:nvPr>
-            <p:ph type="sldNum" sz="quarter" idx="10"/>
-          </p:nvPr>
-        </p:nvSpPr>
-        <p:spPr/>
-        <p:txBody>
-          <a:bodyPr/>
-          <a:lstStyle/>
-          <a:p>
-            <a:fld id="{F7021451-1387-4CA6-816F-3879F97B5CBC}" type="slidenum">
-              <a:rPr lang="en-US"/>
-              <a:t>6</a:t>
             </a:fld>
             <a:endParaRPr lang="en-US"/>
           </a:p>
@@ -1302,7 +1213,7 @@
     <p:bg>
       <p:bgPr>
         <a:solidFill>
-          <a:srgbClr val="FFFFFF"/>
+          <a:srgbClr val="F8FAFC"/>
         </a:solidFill>
       </p:bgPr>
     </p:bg>
@@ -1358,7 +1269,7 @@
                 <a:ea typeface="Calibri" pitchFamily="34" charset="-122"/>
                 <a:cs typeface="Calibri" pitchFamily="34" charset="-120"/>
               </a:rPr>
-              <a:t>Quarterly Sales...</a:t>
+              <a:t>Welcome to Quantum...</a:t>
             </a:r>
             <a:endParaRPr lang="en-US" sz="7200" dirty="0"/>
           </a:p>
@@ -1402,7 +1313,7 @@
                 <a:ea typeface="Calibri" pitchFamily="34" charset="-122"/>
                 <a:cs typeface="Calibri" pitchFamily="34" charset="-120"/>
               </a:rPr>
-              <a:t>Q1 S...</a:t>
+              <a:t>A ne...</a:t>
             </a:r>
             <a:endParaRPr lang="en-US" sz="2400" dirty="0"/>
           </a:p>
@@ -1422,7 +1333,7 @@
     <p:bg>
       <p:bgPr>
         <a:solidFill>
-          <a:srgbClr val="FFFFFF"/>
+          <a:srgbClr val="F8FAFC"/>
         </a:solidFill>
       </p:bgPr>
     </p:bg>
@@ -1448,8 +1359,8 @@
         </p:nvSpPr>
         <p:spPr>
           <a:xfrm>
-            <a:off x="731520" y="411480"/>
-            <a:ext cx="7680960" cy="4320540"/>
+            <a:off x="365760" y="205740"/>
+            <a:ext cx="3840480" cy="4732020"/>
           </a:xfrm>
           <a:prstGeom prst="rect">
             <a:avLst/>
@@ -1463,14 +1374,14 @@
           </a:bodyPr>
           <a:lstStyle/>
           <a:p>
-            <a:pPr algn="ctr" indent="0" marL="0">
+            <a:pPr algn="l" indent="0" marL="0">
               <a:lnSpc>
                 <a:spcPct val="115000"/>
               </a:lnSpc>
               <a:buNone/>
             </a:pPr>
             <a:r>
-              <a:rPr lang="en-US" sz="9600" dirty="0">
+              <a:rPr lang="en-US" sz="4400" b="1" dirty="0">
                 <a:solidFill>
                   <a:srgbClr val="1F2937"/>
                 </a:solidFill>
@@ -1478,9 +1389,9 @@
                 <a:ea typeface="Calibri" pitchFamily="34" charset="-122"/>
                 <a:cs typeface="Calibri" pitchFamily="34" charset="-120"/>
               </a:rPr>
-              <a:t>1...</a:t>
-            </a:r>
-            <a:endParaRPr lang="en-US" sz="9600" dirty="0"/>
+              <a:t>What is Quantum...</a:t>
+            </a:r>
+            <a:endParaRPr lang="en-US" sz="4400" dirty="0"/>
           </a:p>
         </p:txBody>
       </p:sp>
@@ -1492,8 +1403,8 @@
         </p:nvSpPr>
         <p:spPr>
           <a:xfrm>
-            <a:off x="731520" y="5143500"/>
-            <a:ext cx="7680960" cy="51481"/>
+            <a:off x="731520" y="5554980"/>
+            <a:ext cx="3108960" cy="51481"/>
           </a:xfrm>
           <a:prstGeom prst="rect">
             <a:avLst/>
@@ -1507,7 +1418,7 @@
           </a:bodyPr>
           <a:lstStyle/>
           <a:p>
-            <a:pPr algn="ctr" indent="0" marL="0">
+            <a:pPr algn="l" indent="0" marL="0">
               <a:lnSpc>
                 <a:spcPct val="115000"/>
               </a:lnSpc>
@@ -1522,7 +1433,7 @@
                 <a:ea typeface="Calibri" pitchFamily="34" charset="-122"/>
                 <a:cs typeface="Calibri" pitchFamily="34" charset="-120"/>
               </a:rPr>
-              <a:t>Quarte...</a:t>
+              <a:t>...</a:t>
             </a:r>
             <a:endParaRPr lang="en-US" sz="1800" dirty="0"/>
           </a:p>
@@ -1536,8 +1447,8 @@
         </p:nvSpPr>
         <p:spPr>
           <a:xfrm>
-            <a:off x="365760" y="5349240"/>
-            <a:ext cx="8412480" cy="51481"/>
+            <a:off x="731520" y="5966460"/>
+            <a:ext cx="3108960" cy="51481"/>
           </a:xfrm>
           <a:prstGeom prst="rect">
             <a:avLst/>
@@ -1551,7 +1462,7 @@
           </a:bodyPr>
           <a:lstStyle/>
           <a:p>
-            <a:pPr algn="ctr" indent="0" marL="0">
+            <a:pPr algn="l" indent="0" marL="0">
               <a:lnSpc>
                 <a:spcPct val="115000"/>
               </a:lnSpc>
@@ -1566,7 +1477,51 @@
                 <a:ea typeface="Calibri" pitchFamily="34" charset="-122"/>
                 <a:cs typeface="Calibri" pitchFamily="34" charset="-120"/>
               </a:rPr>
-              <a:t>Compari...</a:t>
+              <a:t>...</a:t>
+            </a:r>
+            <a:endParaRPr lang="en-US" sz="1800" dirty="0"/>
+          </a:p>
+        </p:txBody>
+      </p:sp>
+      <p:sp>
+        <p:nvSpPr>
+          <p:cNvPr id="5" name="Text 3"/>
+          <p:cNvSpPr/>
+          <p:nvPr/>
+        </p:nvSpPr>
+        <p:spPr>
+          <a:xfrm>
+            <a:off x="731520" y="6377940"/>
+            <a:ext cx="3108960" cy="51481"/>
+          </a:xfrm>
+          <a:prstGeom prst="rect">
+            <a:avLst/>
+          </a:prstGeom>
+          <a:noFill/>
+          <a:ln/>
+        </p:spPr>
+        <p:txBody>
+          <a:bodyPr wrap="square" lIns="45720" tIns="45720" rIns="45720" bIns="45720" rtlCol="0" anchor="t">
+            <a:normAutofit/>
+          </a:bodyPr>
+          <a:lstStyle/>
+          <a:p>
+            <a:pPr algn="l" indent="0" marL="0">
+              <a:lnSpc>
+                <a:spcPct val="115000"/>
+              </a:lnSpc>
+              <a:buNone/>
+            </a:pPr>
+            <a:r>
+              <a:rPr lang="en-US" sz="1800" dirty="0">
+                <a:solidFill>
+                  <a:srgbClr val="1F2937"/>
+                </a:solidFill>
+                <a:latin typeface="Calibri" pitchFamily="34" charset="0"/>
+                <a:ea typeface="Calibri" pitchFamily="34" charset="-122"/>
+                <a:cs typeface="Calibri" pitchFamily="34" charset="-120"/>
+              </a:rPr>
+              <a:t>...</a:t>
             </a:r>
             <a:endParaRPr lang="en-US" sz="1800" dirty="0"/>
           </a:p>
@@ -1586,7 +1541,7 @@
     <p:bg>
       <p:bgPr>
         <a:solidFill>
-          <a:srgbClr val="FFFFFF"/>
+          <a:srgbClr val="F8FAFC"/>
         </a:solidFill>
       </p:bgPr>
     </p:bg>
@@ -1612,8 +1567,8 @@
         </p:nvSpPr>
         <p:spPr>
           <a:xfrm>
-            <a:off x="365760" y="205740"/>
-            <a:ext cx="3840480" cy="4732020"/>
+            <a:off x="731520" y="411480"/>
+            <a:ext cx="7680960" cy="4320540"/>
           </a:xfrm>
           <a:prstGeom prst="rect">
             <a:avLst/>
@@ -1627,14 +1582,14 @@
           </a:bodyPr>
           <a:lstStyle/>
           <a:p>
-            <a:pPr algn="l" indent="0" marL="0">
+            <a:pPr algn="ctr" indent="0" marL="0">
               <a:lnSpc>
                 <a:spcPct val="115000"/>
               </a:lnSpc>
               <a:buNone/>
             </a:pPr>
             <a:r>
-              <a:rPr lang="en-US" sz="4400" b="1" dirty="0">
+              <a:rPr lang="en-US" sz="9600" dirty="0">
                 <a:solidFill>
                   <a:srgbClr val="1F2937"/>
                 </a:solidFill>
@@ -1642,9 +1597,9 @@
                 <a:ea typeface="Calibri" pitchFamily="34" charset="-122"/>
                 <a:cs typeface="Calibri" pitchFamily="34" charset="-120"/>
               </a:rPr>
-              <a:t>Sales...</a:t>
-            </a:r>
-            <a:endParaRPr lang="en-US" sz="4400" dirty="0"/>
+              <a:t>10...</a:t>
+            </a:r>
+            <a:endParaRPr lang="en-US" sz="9600" dirty="0"/>
           </a:p>
         </p:txBody>
       </p:sp>
@@ -1656,8 +1611,8 @@
         </p:nvSpPr>
         <p:spPr>
           <a:xfrm>
-            <a:off x="731520" y="5554980"/>
-            <a:ext cx="3108960" cy="51481"/>
+            <a:off x="731520" y="5143500"/>
+            <a:ext cx="7680960" cy="51481"/>
           </a:xfrm>
           <a:prstGeom prst="rect">
             <a:avLst/>
@@ -1671,7 +1626,7 @@
           </a:bodyPr>
           <a:lstStyle/>
           <a:p>
-            <a:pPr algn="l" indent="0" marL="0">
+            <a:pPr algn="ctr" indent="0" marL="0">
               <a:lnSpc>
                 <a:spcPct val="115000"/>
               </a:lnSpc>
@@ -1686,7 +1641,7 @@
                 <a:ea typeface="Calibri" pitchFamily="34" charset="-122"/>
                 <a:cs typeface="Calibri" pitchFamily="34" charset="-120"/>
               </a:rPr>
-              <a:t>...</a:t>
+              <a:t>Faster...</a:t>
             </a:r>
             <a:endParaRPr lang="en-US" sz="1800" dirty="0"/>
           </a:p>
@@ -1700,8 +1655,8 @@
         </p:nvSpPr>
         <p:spPr>
           <a:xfrm>
-            <a:off x="731520" y="5966460"/>
-            <a:ext cx="3108960" cy="51481"/>
+            <a:off x="365760" y="5349240"/>
+            <a:ext cx="8412480" cy="51481"/>
           </a:xfrm>
           <a:prstGeom prst="rect">
             <a:avLst/>
@@ -1715,7 +1670,7 @@
           </a:bodyPr>
           <a:lstStyle/>
           <a:p>
-            <a:pPr algn="l" indent="0" marL="0">
+            <a:pPr algn="ctr" indent="0" marL="0">
               <a:lnSpc>
                 <a:spcPct val="115000"/>
               </a:lnSpc>
@@ -1730,51 +1685,7 @@
                 <a:ea typeface="Calibri" pitchFamily="34" charset="-122"/>
                 <a:cs typeface="Calibri" pitchFamily="34" charset="-120"/>
               </a:rPr>
-              <a:t>...</a:t>
-            </a:r>
-            <a:endParaRPr lang="en-US" sz="1800" dirty="0"/>
-          </a:p>
-        </p:txBody>
-      </p:sp>
-      <p:sp>
-        <p:nvSpPr>
-          <p:cNvPr id="5" name="Text 3"/>
-          <p:cNvSpPr/>
-          <p:nvPr/>
-        </p:nvSpPr>
-        <p:spPr>
-          <a:xfrm>
-            <a:off x="731520" y="6377940"/>
-            <a:ext cx="3108960" cy="51481"/>
-          </a:xfrm>
-          <a:prstGeom prst="rect">
-            <a:avLst/>
-          </a:prstGeom>
-          <a:noFill/>
-          <a:ln/>
-        </p:spPr>
-        <p:txBody>
-          <a:bodyPr wrap="square" lIns="45720" tIns="45720" rIns="45720" bIns="45720" rtlCol="0" anchor="t">
-            <a:normAutofit/>
-          </a:bodyPr>
-          <a:lstStyle/>
-          <a:p>
-            <a:pPr algn="l" indent="0" marL="0">
-              <a:lnSpc>
-                <a:spcPct val="115000"/>
-              </a:lnSpc>
-              <a:buNone/>
-            </a:pPr>
-            <a:r>
-              <a:rPr lang="en-US" sz="1800" dirty="0">
-                <a:solidFill>
-                  <a:srgbClr val="1F2937"/>
-                </a:solidFill>
-                <a:latin typeface="Calibri" pitchFamily="34" charset="0"/>
-                <a:ea typeface="Calibri" pitchFamily="34" charset="-122"/>
-                <a:cs typeface="Calibri" pitchFamily="34" charset="-120"/>
-              </a:rPr>
-              <a:t>...</a:t>
+              <a:t>Quantum...</a:t>
             </a:r>
             <a:endParaRPr lang="en-US" sz="1800" dirty="0"/>
           </a:p>
@@ -1794,7 +1705,7 @@
     <p:bg>
       <p:bgPr>
         <a:solidFill>
-          <a:srgbClr val="FFFFFF"/>
+          <a:srgbClr val="F8FAFC"/>
         </a:solidFill>
       </p:bgPr>
     </p:bg>
@@ -1820,8 +1731,8 @@
         </p:nvSpPr>
         <p:spPr>
           <a:xfrm>
-            <a:off x="365760" y="205740"/>
-            <a:ext cx="3840480" cy="4732020"/>
+            <a:off x="731520" y="411480"/>
+            <a:ext cx="3657600" cy="4320540"/>
           </a:xfrm>
           <a:prstGeom prst="rect">
             <a:avLst/>
@@ -1835,14 +1746,14 @@
           </a:bodyPr>
           <a:lstStyle/>
           <a:p>
-            <a:pPr algn="ctr" indent="0" marL="0">
+            <a:pPr algn="l" indent="0" marL="0">
               <a:lnSpc>
                 <a:spcPct val="115000"/>
               </a:lnSpc>
               <a:buNone/>
             </a:pPr>
             <a:r>
-              <a:rPr lang="en-US" sz="4400" b="1" dirty="0">
+              <a:rPr lang="en-US" sz="4000" b="1" dirty="0">
                 <a:solidFill>
                   <a:srgbClr val="1F2937"/>
                 </a:solidFill>
@@ -1850,9 +1761,9 @@
                 <a:ea typeface="Calibri" pitchFamily="34" charset="-122"/>
                 <a:cs typeface="Calibri" pitchFamily="34" charset="-120"/>
               </a:rPr>
-              <a:t>Regional Sales...</a:t>
-            </a:r>
-            <a:endParaRPr lang="en-US" sz="4400" dirty="0"/>
+              <a:t>Real-World Applications</a:t>
+            </a:r>
+            <a:endParaRPr lang="en-US" sz="4000" dirty="0"/>
           </a:p>
         </p:txBody>
       </p:sp>
@@ -1864,8 +1775,8 @@
         </p:nvSpPr>
         <p:spPr>
           <a:xfrm>
-            <a:off x="365760" y="4937760"/>
-            <a:ext cx="3840480" cy="51481"/>
+            <a:off x="5120640" y="617220"/>
+            <a:ext cx="2926080" cy="3909060"/>
           </a:xfrm>
           <a:prstGeom prst="rect">
             <a:avLst/>
@@ -1879,14 +1790,14 @@
           </a:bodyPr>
           <a:lstStyle/>
           <a:p>
-            <a:pPr algn="ctr" indent="0" marL="0">
+            <a:pPr algn="l" indent="0" marL="0">
               <a:lnSpc>
                 <a:spcPct val="115000"/>
               </a:lnSpc>
               <a:buNone/>
             </a:pPr>
             <a:r>
-              <a:rPr lang="en-US" sz="1800" dirty="0">
+              <a:rPr lang="en-US" sz="1600" dirty="0">
                 <a:solidFill>
                   <a:srgbClr val="1F2937"/>
                 </a:solidFill>
@@ -1894,9 +1805,97 @@
                 <a:ea typeface="Calibri" pitchFamily="34" charset="-122"/>
                 <a:cs typeface="Calibri" pitchFamily="34" charset="-120"/>
               </a:rPr>
-              <a:t>N...</a:t>
-            </a:r>
-            <a:endParaRPr lang="en-US" sz="1800" dirty="0"/>
+              <a:t>🔒 Crypto...</a:t>
+            </a:r>
+            <a:endParaRPr lang="en-US" sz="1600" dirty="0"/>
+          </a:p>
+        </p:txBody>
+      </p:sp>
+      <p:sp>
+        <p:nvSpPr>
+          <p:cNvPr id="4" name="Text 2"/>
+          <p:cNvSpPr/>
+          <p:nvPr/>
+        </p:nvSpPr>
+        <p:spPr>
+          <a:xfrm>
+            <a:off x="5120640" y="4937760"/>
+            <a:ext cx="2926080" cy="51481"/>
+          </a:xfrm>
+          <a:prstGeom prst="rect">
+            <a:avLst/>
+          </a:prstGeom>
+          <a:noFill/>
+          <a:ln/>
+        </p:spPr>
+        <p:txBody>
+          <a:bodyPr wrap="square" lIns="45720" tIns="45720" rIns="45720" bIns="45720" rtlCol="0" anchor="t">
+            <a:normAutofit/>
+          </a:bodyPr>
+          <a:lstStyle/>
+          <a:p>
+            <a:pPr algn="l" indent="0" marL="0">
+              <a:lnSpc>
+                <a:spcPct val="115000"/>
+              </a:lnSpc>
+              <a:buNone/>
+            </a:pPr>
+            <a:r>
+              <a:rPr lang="en-US" sz="1600" dirty="0">
+                <a:solidFill>
+                  <a:srgbClr val="1F2937"/>
+                </a:solidFill>
+                <a:latin typeface="Calibri" pitchFamily="34" charset="0"/>
+                <a:ea typeface="Calibri" pitchFamily="34" charset="-122"/>
+                <a:cs typeface="Calibri" pitchFamily="34" charset="-120"/>
+              </a:rPr>
+              <a:t>�...</a:t>
+            </a:r>
+            <a:endParaRPr lang="en-US" sz="1600" dirty="0"/>
+          </a:p>
+        </p:txBody>
+      </p:sp>
+      <p:sp>
+        <p:nvSpPr>
+          <p:cNvPr id="5" name="Text 3"/>
+          <p:cNvSpPr/>
+          <p:nvPr/>
+        </p:nvSpPr>
+        <p:spPr>
+          <a:xfrm>
+            <a:off x="5120640" y="5349240"/>
+            <a:ext cx="2926080" cy="51481"/>
+          </a:xfrm>
+          <a:prstGeom prst="rect">
+            <a:avLst/>
+          </a:prstGeom>
+          <a:noFill/>
+          <a:ln/>
+        </p:spPr>
+        <p:txBody>
+          <a:bodyPr wrap="square" lIns="45720" tIns="45720" rIns="45720" bIns="45720" rtlCol="0" anchor="t">
+            <a:normAutofit/>
+          </a:bodyPr>
+          <a:lstStyle/>
+          <a:p>
+            <a:pPr algn="l" indent="0" marL="0">
+              <a:lnSpc>
+                <a:spcPct val="115000"/>
+              </a:lnSpc>
+              <a:buNone/>
+            </a:pPr>
+            <a:r>
+              <a:rPr lang="en-US" sz="1600" dirty="0">
+                <a:solidFill>
+                  <a:srgbClr val="1F2937"/>
+                </a:solidFill>
+                <a:latin typeface="Calibri" pitchFamily="34" charset="0"/>
+                <a:ea typeface="Calibri" pitchFamily="34" charset="-122"/>
+                <a:cs typeface="Calibri" pitchFamily="34" charset="-120"/>
+              </a:rPr>
+              <a:t>�...</a:t>
+            </a:r>
+            <a:endParaRPr lang="en-US" sz="1600" dirty="0"/>
           </a:p>
         </p:txBody>
       </p:sp>
@@ -1914,7 +1913,7 @@
     <p:bg>
       <p:bgPr>
         <a:solidFill>
-          <a:srgbClr val="FFFFFF"/>
+          <a:srgbClr val="F8FAFC"/>
         </a:solidFill>
       </p:bgPr>
     </p:bg>
@@ -1940,8 +1939,8 @@
         </p:nvSpPr>
         <p:spPr>
           <a:xfrm>
-            <a:off x="731520" y="411480"/>
-            <a:ext cx="7680960" cy="4320540"/>
+            <a:off x="365760" y="205740"/>
+            <a:ext cx="8412480" cy="4732020"/>
           </a:xfrm>
           <a:prstGeom prst="rect">
             <a:avLst/>
@@ -1962,7 +1961,7 @@
               <a:buNone/>
             </a:pPr>
             <a:r>
-              <a:rPr lang="en-US" sz="9600" dirty="0">
+              <a:rPr lang="en-US" sz="6400" b="1" dirty="0">
                 <a:solidFill>
                   <a:srgbClr val="1F2937"/>
                 </a:solidFill>
@@ -1970,59 +1969,15 @@
                 <a:ea typeface="Calibri" pitchFamily="34" charset="-122"/>
                 <a:cs typeface="Calibri" pitchFamily="34" charset="-120"/>
               </a:rPr>
-              <a:t>1...</a:t>
-            </a:r>
-            <a:endParaRPr lang="en-US" sz="9600" dirty="0"/>
+              <a:t>Conclusio...</a:t>
+            </a:r>
+            <a:endParaRPr lang="en-US" sz="6400" dirty="0"/>
           </a:p>
         </p:txBody>
       </p:sp>
       <p:sp>
         <p:nvSpPr>
           <p:cNvPr id="3" name="Text 1"/>
-          <p:cNvSpPr/>
-          <p:nvPr/>
-        </p:nvSpPr>
-        <p:spPr>
-          <a:xfrm>
-            <a:off x="731520" y="5143500"/>
-            <a:ext cx="7680960" cy="51481"/>
-          </a:xfrm>
-          <a:prstGeom prst="rect">
-            <a:avLst/>
-          </a:prstGeom>
-          <a:noFill/>
-          <a:ln/>
-        </p:spPr>
-        <p:txBody>
-          <a:bodyPr wrap="square" lIns="45720" tIns="45720" rIns="45720" bIns="45720" rtlCol="0" anchor="t">
-            <a:normAutofit/>
-          </a:bodyPr>
-          <a:lstStyle/>
-          <a:p>
-            <a:pPr algn="ctr" indent="0" marL="0">
-              <a:lnSpc>
-                <a:spcPct val="115000"/>
-              </a:lnSpc>
-              <a:buNone/>
-            </a:pPr>
-            <a:r>
-              <a:rPr lang="en-US" sz="1800" dirty="0">
-                <a:solidFill>
-                  <a:srgbClr val="1F2937"/>
-                </a:solidFill>
-                <a:latin typeface="Calibri" pitchFamily="34" charset="0"/>
-                <a:ea typeface="Calibri" pitchFamily="34" charset="-122"/>
-                <a:cs typeface="Calibri" pitchFamily="34" charset="-120"/>
-              </a:rPr>
-              <a:t>Projec...</a:t>
-            </a:r>
-            <a:endParaRPr lang="en-US" sz="1800" dirty="0"/>
-          </a:p>
-        </p:txBody>
-      </p:sp>
-      <p:sp>
-        <p:nvSpPr>
-          <p:cNvPr id="4" name="Text 2"/>
           <p:cNvSpPr/>
           <p:nvPr/>
         </p:nvSpPr>
@@ -2050,7 +2005,7 @@
               <a:buNone/>
             </a:pPr>
             <a:r>
-              <a:rPr lang="en-US" sz="1800" dirty="0">
+              <a:rPr lang="en-US" sz="2200" dirty="0">
                 <a:solidFill>
                   <a:srgbClr val="1F2937"/>
                 </a:solidFill>
@@ -2058,97 +2013,21 @@
                 <a:ea typeface="Calibri" pitchFamily="34" charset="-122"/>
                 <a:cs typeface="Calibri" pitchFamily="34" charset="-120"/>
               </a:rPr>
-              <a:t>Based o...</a:t>
-            </a:r>
-            <a:endParaRPr lang="en-US" sz="1800" dirty="0"/>
-          </a:p>
-        </p:txBody>
-      </p:sp>
-    </p:spTree>
-  </p:cSld>
-  <p:clrMapOvr>
-    <a:masterClrMapping/>
-  </p:clrMapOvr>
-</p:sld>
-</file>
-
-<file path=ppt/slides/slide6.xml><?xml version="1.0" encoding="utf-8"?>
-<p:sld xmlns:a="http://schemas.openxmlformats.org/drawingml/2006/main" xmlns:r="http://schemas.openxmlformats.org/officeDocument/2006/relationships" xmlns:p="http://schemas.openxmlformats.org/presentationml/2006/main">
-  <p:cSld name="Slide 6">
-    <p:bg>
-      <p:bgPr>
-        <a:solidFill>
-          <a:srgbClr val="FFFFFF"/>
-        </a:solidFill>
-      </p:bgPr>
-    </p:bg>
-    <p:spTree>
-      <p:nvGrpSpPr>
-        <p:cNvPr id="1" name=""/>
-        <p:cNvGrpSpPr/>
-        <p:nvPr/>
-      </p:nvGrpSpPr>
-      <p:grpSpPr>
-        <a:xfrm>
-          <a:off x="0" y="0"/>
-          <a:ext cx="0" cy="0"/>
-          <a:chOff x="0" y="0"/>
-          <a:chExt cx="0" cy="0"/>
-        </a:xfrm>
-      </p:grpSpPr>
-      <p:sp>
-        <p:nvSpPr>
-          <p:cNvPr id="2" name="Text 0"/>
+              <a:t>Quant...</a:t>
+            </a:r>
+            <a:endParaRPr lang="en-US" sz="2200" dirty="0"/>
+          </a:p>
+        </p:txBody>
+      </p:sp>
+      <p:sp>
+        <p:nvSpPr>
+          <p:cNvPr id="4" name="Text 2"/>
           <p:cNvSpPr/>
           <p:nvPr/>
         </p:nvSpPr>
         <p:spPr>
           <a:xfrm>
-            <a:off x="365760" y="205740"/>
-            <a:ext cx="8412480" cy="4732020"/>
-          </a:xfrm>
-          <a:prstGeom prst="rect">
-            <a:avLst/>
-          </a:prstGeom>
-          <a:noFill/>
-          <a:ln/>
-        </p:spPr>
-        <p:txBody>
-          <a:bodyPr wrap="square" lIns="45720" tIns="45720" rIns="45720" bIns="45720" rtlCol="0" anchor="t">
-            <a:normAutofit/>
-          </a:bodyPr>
-          <a:lstStyle/>
-          <a:p>
-            <a:pPr algn="ctr" indent="0" marL="0">
-              <a:lnSpc>
-                <a:spcPct val="115000"/>
-              </a:lnSpc>
-              <a:buNone/>
-            </a:pPr>
-            <a:r>
-              <a:rPr lang="en-US" sz="6400" b="1" dirty="0">
-                <a:solidFill>
-                  <a:srgbClr val="1F2937"/>
-                </a:solidFill>
-                <a:latin typeface="Calibri" pitchFamily="34" charset="0"/>
-                <a:ea typeface="Calibri" pitchFamily="34" charset="-122"/>
-                <a:cs typeface="Calibri" pitchFamily="34" charset="-120"/>
-              </a:rPr>
-              <a:t>Conclusion and...</a:t>
-            </a:r>
-            <a:endParaRPr lang="en-US" sz="6400" dirty="0"/>
-          </a:p>
-        </p:txBody>
-      </p:sp>
-      <p:sp>
-        <p:nvSpPr>
-          <p:cNvPr id="3" name="Text 1"/>
-          <p:cNvSpPr/>
-          <p:nvPr/>
-        </p:nvSpPr>
-        <p:spPr>
-          <a:xfrm>
-            <a:off x="365760" y="5349240"/>
+            <a:off x="365760" y="5760720"/>
             <a:ext cx="8412480" cy="51481"/>
           </a:xfrm>
           <a:prstGeom prst="rect">
@@ -2178,7 +2057,7 @@
                 <a:ea typeface="Calibri" pitchFamily="34" charset="-122"/>
                 <a:cs typeface="Calibri" pitchFamily="34" charset="-120"/>
               </a:rPr>
-              <a:t>Focus...</a:t>
+              <a:t>Conti...</a:t>
             </a:r>
             <a:endParaRPr lang="en-US" sz="2200" dirty="0"/>
           </a:p>
